--- a/BDA_IFM/HW1.pptx
+++ b/BDA_IFM/HW1.pptx
@@ -249,7 +249,7 @@
           <a:p>
             <a:fld id="{9553D06D-798D-41B2-8E09-945CDEC492DF}" type="datetimeFigureOut">
               <a:rPr lang="zh-TW" altLang="en-US" smtClean="0"/>
-              <a:t>2025/9/15</a:t>
+              <a:t>2026/9/28</a:t>
             </a:fld>
             <a:endParaRPr lang="zh-TW" altLang="en-US"/>
           </a:p>
@@ -417,7 +417,7 @@
           <a:p>
             <a:fld id="{9553D06D-798D-41B2-8E09-945CDEC492DF}" type="datetimeFigureOut">
               <a:rPr lang="zh-TW" altLang="en-US" smtClean="0"/>
-              <a:t>2025/9/15</a:t>
+              <a:t>2026/9/28</a:t>
             </a:fld>
             <a:endParaRPr lang="zh-TW" altLang="en-US"/>
           </a:p>
@@ -595,7 +595,7 @@
           <a:p>
             <a:fld id="{9553D06D-798D-41B2-8E09-945CDEC492DF}" type="datetimeFigureOut">
               <a:rPr lang="zh-TW" altLang="en-US" smtClean="0"/>
-              <a:t>2025/9/15</a:t>
+              <a:t>2026/9/28</a:t>
             </a:fld>
             <a:endParaRPr lang="zh-TW" altLang="en-US"/>
           </a:p>
@@ -763,7 +763,7 @@
           <a:p>
             <a:fld id="{9553D06D-798D-41B2-8E09-945CDEC492DF}" type="datetimeFigureOut">
               <a:rPr lang="zh-TW" altLang="en-US" smtClean="0"/>
-              <a:t>2025/9/15</a:t>
+              <a:t>2026/9/28</a:t>
             </a:fld>
             <a:endParaRPr lang="zh-TW" altLang="en-US"/>
           </a:p>
@@ -1008,7 +1008,7 @@
           <a:p>
             <a:fld id="{9553D06D-798D-41B2-8E09-945CDEC492DF}" type="datetimeFigureOut">
               <a:rPr lang="zh-TW" altLang="en-US" smtClean="0"/>
-              <a:t>2025/9/15</a:t>
+              <a:t>2026/9/28</a:t>
             </a:fld>
             <a:endParaRPr lang="zh-TW" altLang="en-US"/>
           </a:p>
@@ -1237,7 +1237,7 @@
           <a:p>
             <a:fld id="{9553D06D-798D-41B2-8E09-945CDEC492DF}" type="datetimeFigureOut">
               <a:rPr lang="zh-TW" altLang="en-US" smtClean="0"/>
-              <a:t>2025/9/15</a:t>
+              <a:t>2026/9/28</a:t>
             </a:fld>
             <a:endParaRPr lang="zh-TW" altLang="en-US"/>
           </a:p>
@@ -1601,7 +1601,7 @@
           <a:p>
             <a:fld id="{9553D06D-798D-41B2-8E09-945CDEC492DF}" type="datetimeFigureOut">
               <a:rPr lang="zh-TW" altLang="en-US" smtClean="0"/>
-              <a:t>2025/9/15</a:t>
+              <a:t>2026/9/28</a:t>
             </a:fld>
             <a:endParaRPr lang="zh-TW" altLang="en-US"/>
           </a:p>
@@ -1718,7 +1718,7 @@
           <a:p>
             <a:fld id="{9553D06D-798D-41B2-8E09-945CDEC492DF}" type="datetimeFigureOut">
               <a:rPr lang="zh-TW" altLang="en-US" smtClean="0"/>
-              <a:t>2025/9/15</a:t>
+              <a:t>2026/9/28</a:t>
             </a:fld>
             <a:endParaRPr lang="zh-TW" altLang="en-US"/>
           </a:p>
@@ -1813,7 +1813,7 @@
           <a:p>
             <a:fld id="{9553D06D-798D-41B2-8E09-945CDEC492DF}" type="datetimeFigureOut">
               <a:rPr lang="zh-TW" altLang="en-US" smtClean="0"/>
-              <a:t>2025/9/15</a:t>
+              <a:t>2026/9/28</a:t>
             </a:fld>
             <a:endParaRPr lang="zh-TW" altLang="en-US"/>
           </a:p>
@@ -2088,7 +2088,7 @@
           <a:p>
             <a:fld id="{9553D06D-798D-41B2-8E09-945CDEC492DF}" type="datetimeFigureOut">
               <a:rPr lang="zh-TW" altLang="en-US" smtClean="0"/>
-              <a:t>2025/9/15</a:t>
+              <a:t>2026/9/28</a:t>
             </a:fld>
             <a:endParaRPr lang="zh-TW" altLang="en-US"/>
           </a:p>
@@ -2340,7 +2340,7 @@
           <a:p>
             <a:fld id="{9553D06D-798D-41B2-8E09-945CDEC492DF}" type="datetimeFigureOut">
               <a:rPr lang="zh-TW" altLang="en-US" smtClean="0"/>
-              <a:t>2025/9/15</a:t>
+              <a:t>2026/9/28</a:t>
             </a:fld>
             <a:endParaRPr lang="zh-TW" altLang="en-US"/>
           </a:p>
@@ -2551,7 +2551,7 @@
           <a:p>
             <a:fld id="{9553D06D-798D-41B2-8E09-945CDEC492DF}" type="datetimeFigureOut">
               <a:rPr lang="zh-TW" altLang="en-US" smtClean="0"/>
-              <a:t>2025/9/15</a:t>
+              <a:t>2026/9/28</a:t>
             </a:fld>
             <a:endParaRPr lang="zh-TW" altLang="en-US"/>
           </a:p>
@@ -3002,15 +3002,7 @@
           <a:p>
             <a:r>
               <a:rPr lang="en-US" altLang="zh-TW" dirty="0"/>
-              <a:t>Sep. </a:t>
-            </a:r>
-            <a:r>
-              <a:rPr lang="en-US" altLang="zh-TW"/>
-              <a:t>23, </a:t>
-            </a:r>
-            <a:r>
-              <a:rPr lang="en-US" altLang="zh-TW" dirty="0"/>
-              <a:t>2025</a:t>
+              <a:t>Sep. 29, 2026</a:t>
             </a:r>
             <a:endParaRPr lang="zh-TW" altLang="en-US" dirty="0"/>
           </a:p>
@@ -3120,7 +3112,7 @@
             <a:pPr lvl="1"/>
             <a:r>
               <a:rPr lang="en-US" altLang="zh-TW" dirty="0"/>
-              <a:t>3.6(a)(c)</a:t>
+              <a:t>3.6(a)(b)</a:t>
             </a:r>
           </a:p>
           <a:p>
@@ -3141,7 +3133,7 @@
                   <a:srgbClr val="FF0000"/>
                 </a:solidFill>
               </a:rPr>
-              <a:t>Oct. 7, 2025</a:t>
+              <a:t>Oct. 13, 2026</a:t>
             </a:r>
             <a:r>
               <a:rPr lang="en-US" altLang="zh-TW" dirty="0"/>
@@ -3581,7 +3573,7 @@
           <a:p>
             <a:r>
               <a:rPr lang="en-US" altLang="zh-TW" dirty="0"/>
-              <a:t>(c) z-score normalization using the mean absolute deviation instead of standard deviation</a:t>
+              <a:t>(b) z-score normalization</a:t>
             </a:r>
             <a:endParaRPr lang="zh-TW" altLang="en-US" dirty="0"/>
           </a:p>
